--- a/doc-mk/DP4/DP-overview-slide-draft.pptx
+++ b/doc-mk/DP4/DP-overview-slide-draft.pptx
@@ -4913,7 +4913,7 @@
                           <a:ea typeface="+mn-ea"/>
                           <a:cs typeface="+mn-cs"/>
                         </a:rPr>
-                        <a:t>DP4. 서버 간 KV 공유 구조</a:t>
+                        <a:t>DP4. 비일관 CXL 공유 메모리의 KV 일관성 구조</a:t>
                       </a:r>
                       <a:endParaRPr lang="ko-KR" altLang="en-US" sz="1200" strike="noStrike" kern="1200" dirty="0">
                         <a:solidFill>
